--- a/LabBook_20.pptx
+++ b/LabBook_20.pptx
@@ -16396,6 +16396,20 @@
                 <a:latin typeface="Arial" panose="020B0604020202020204" pitchFamily="34" charset="0"/>
                 <a:cs typeface="Arial" panose="020B0604020202020204" pitchFamily="34" charset="0"/>
               </a:rPr>
+              <a:t> la </a:t>
+            </a:r>
+            <a:r>
+              <a:rPr lang="en-US" sz="1200" dirty="0" err="1">
+                <a:latin typeface="Arial" panose="020B0604020202020204" pitchFamily="34" charset="0"/>
+                <a:cs typeface="Arial" panose="020B0604020202020204" pitchFamily="34" charset="0"/>
+              </a:rPr>
+              <a:t>que</a:t>
+            </a:r>
+            <a:r>
+              <a:rPr lang="en-US" sz="1200" dirty="0">
+                <a:latin typeface="Arial" panose="020B0604020202020204" pitchFamily="34" charset="0"/>
+                <a:cs typeface="Arial" panose="020B0604020202020204" pitchFamily="34" charset="0"/>
+              </a:rPr>
               <a:t> </a:t>
             </a:r>
             <a:r>
@@ -16403,6 +16417,20 @@
                 <a:latin typeface="Arial" panose="020B0604020202020204" pitchFamily="34" charset="0"/>
                 <a:cs typeface="Arial" panose="020B0604020202020204" pitchFamily="34" charset="0"/>
               </a:rPr>
+              <a:t>tiene</a:t>
+            </a:r>
+            <a:r>
+              <a:rPr lang="en-US" sz="1200" dirty="0">
+                <a:latin typeface="Arial" panose="020B0604020202020204" pitchFamily="34" charset="0"/>
+                <a:cs typeface="Arial" panose="020B0604020202020204" pitchFamily="34" charset="0"/>
+              </a:rPr>
+              <a:t> </a:t>
+            </a:r>
+            <a:r>
+              <a:rPr lang="en-US" sz="1200" dirty="0" err="1">
+                <a:latin typeface="Arial" panose="020B0604020202020204" pitchFamily="34" charset="0"/>
+                <a:cs typeface="Arial" panose="020B0604020202020204" pitchFamily="34" charset="0"/>
+              </a:rPr>
               <a:t>el</a:t>
             </a:r>
             <a:r>
@@ -16410,7 +16438,56 @@
                 <a:latin typeface="Arial" panose="020B0604020202020204" pitchFamily="34" charset="0"/>
                 <a:cs typeface="Arial" panose="020B0604020202020204" pitchFamily="34" charset="0"/>
               </a:rPr>
-              <a:t> modo TM. </a:t>
+              <a:t> </a:t>
+            </a:r>
+            <a:r>
+              <a:rPr lang="en-US" sz="1200">
+                <a:latin typeface="Arial" panose="020B0604020202020204" pitchFamily="34" charset="0"/>
+                <a:cs typeface="Arial" panose="020B0604020202020204" pitchFamily="34" charset="0"/>
+              </a:rPr>
+              <a:t>modo TM, </a:t>
+            </a:r>
+            <a:r>
+              <a:rPr lang="en-US" sz="1200" dirty="0" err="1">
+                <a:latin typeface="Arial" panose="020B0604020202020204" pitchFamily="34" charset="0"/>
+                <a:cs typeface="Arial" panose="020B0604020202020204" pitchFamily="34" charset="0"/>
+              </a:rPr>
+              <a:t>que</a:t>
+            </a:r>
+            <a:r>
+              <a:rPr lang="en-US" sz="1200" dirty="0">
+                <a:latin typeface="Arial" panose="020B0604020202020204" pitchFamily="34" charset="0"/>
+                <a:cs typeface="Arial" panose="020B0604020202020204" pitchFamily="34" charset="0"/>
+              </a:rPr>
+              <a:t> es </a:t>
+            </a:r>
+            <a:r>
+              <a:rPr lang="en-US" sz="1200" dirty="0" err="1">
+                <a:latin typeface="Arial" panose="020B0604020202020204" pitchFamily="34" charset="0"/>
+                <a:cs typeface="Arial" panose="020B0604020202020204" pitchFamily="34" charset="0"/>
+              </a:rPr>
+              <a:t>mucho</a:t>
+            </a:r>
+            <a:r>
+              <a:rPr lang="en-US" sz="1200" dirty="0">
+                <a:latin typeface="Arial" panose="020B0604020202020204" pitchFamily="34" charset="0"/>
+                <a:cs typeface="Arial" panose="020B0604020202020204" pitchFamily="34" charset="0"/>
+              </a:rPr>
+              <a:t> </a:t>
+            </a:r>
+            <a:r>
+              <a:rPr lang="en-US" sz="1200" dirty="0" err="1">
+                <a:latin typeface="Arial" panose="020B0604020202020204" pitchFamily="34" charset="0"/>
+                <a:cs typeface="Arial" panose="020B0604020202020204" pitchFamily="34" charset="0"/>
+              </a:rPr>
+              <a:t>menor</a:t>
+            </a:r>
+            <a:r>
+              <a:rPr lang="en-US" sz="1200" dirty="0">
+                <a:latin typeface="Arial" panose="020B0604020202020204" pitchFamily="34" charset="0"/>
+                <a:cs typeface="Arial" panose="020B0604020202020204" pitchFamily="34" charset="0"/>
+              </a:rPr>
+              <a:t>.</a:t>
             </a:r>
           </a:p>
           <a:p>
